--- a/heart_disease_present.pptx
+++ b/heart_disease_present.pptx
@@ -5578,7 +5578,7 @@
             </a:r>
             <a:r>
               <a:rPr lang="tr-TR" sz="1100" dirty="0"/>
-              <a:t> olduğunu gözlemleriz.</a:t>
+              <a:t> olduğunu söyleyebiliriz.</a:t>
             </a:r>
             <a:endParaRPr lang="tr-TR" sz="1100" dirty="0">
               <a:solidFill>
